--- a/Courses/CSCE711-Applied-Cryptography/Slides/M06-Key-Exchange-and-Public-Keys.pptx
+++ b/Courses/CSCE711-Applied-Cryptography/Slides/M06-Key-Exchange-and-Public-Keys.pptx
@@ -4022,7 +4022,7 @@
                 </a:solidFill>
                 <a:latin typeface="Calibri"/>
               </a:rPr>
-              <a:t>CSCE 711 · Module 06 of 7 · original material, share freely</a:t>
+              <a:t>CSCE 711 · Module 06 of 13 · original material, share freely</a:t>
             </a:r>
           </a:p>
         </p:txBody>
